--- a/slides/TP558_X_Template.pptx
+++ b/slides/TP558_X_Template.pptx
@@ -13,12 +13,12 @@
   <p:sldIdLst>
     <p:sldId id="256" r:id="rId2"/>
     <p:sldId id="307" r:id="rId3"/>
-    <p:sldId id="308" r:id="rId4"/>
-    <p:sldId id="309" r:id="rId5"/>
-    <p:sldId id="310" r:id="rId6"/>
-    <p:sldId id="311" r:id="rId7"/>
-    <p:sldId id="312" r:id="rId8"/>
-    <p:sldId id="313" r:id="rId9"/>
+    <p:sldId id="315" r:id="rId4"/>
+    <p:sldId id="308" r:id="rId5"/>
+    <p:sldId id="309" r:id="rId6"/>
+    <p:sldId id="310" r:id="rId7"/>
+    <p:sldId id="311" r:id="rId8"/>
+    <p:sldId id="312" r:id="rId9"/>
     <p:sldId id="293" r:id="rId10"/>
     <p:sldId id="314" r:id="rId11"/>
     <p:sldId id="306" r:id="rId12"/>
@@ -285,7 +285,7 @@
           <a:p>
             <a:fld id="{144F1436-6906-4D93-B7A2-786C327BFA14}" type="datetimeFigureOut">
               <a:rPr lang="nl-BE" smtClean="0"/>
-              <a:t>19/02/2024</a:t>
+              <a:t>1/03/2026</a:t>
             </a:fld>
             <a:endParaRPr lang="nl-BE"/>
           </a:p>
@@ -351,7 +351,7 @@
           <a:p>
             <a:fld id="{F7E56D9B-79AD-444A-AFED-DEC23408F8B4}" type="slidenum">
               <a:rPr lang="nl-BE" smtClean="0"/>
-              <a:t>‹nº›</a:t>
+              <a:t>‹#›</a:t>
             </a:fld>
             <a:endParaRPr lang="nl-BE"/>
           </a:p>
@@ -450,7 +450,7 @@
           <a:p>
             <a:fld id="{AA8CD09E-2914-4F47-B6C1-51B2C31814C9}" type="datetimeFigureOut">
               <a:rPr lang="pt-BR" smtClean="0"/>
-              <a:t>19/02/2024</a:t>
+              <a:t>01/03/2026</a:t>
             </a:fld>
             <a:endParaRPr lang="pt-BR"/>
           </a:p>
@@ -608,7 +608,7 @@
           <a:p>
             <a:fld id="{6FC8D850-966F-45A6-8DE7-15B891E7D40D}" type="slidenum">
               <a:rPr lang="pt-BR" smtClean="0"/>
-              <a:t>‹nº›</a:t>
+              <a:t>‹#›</a:t>
             </a:fld>
             <a:endParaRPr lang="pt-BR"/>
           </a:p>
@@ -948,7 +948,7 @@
           <a:p>
             <a:fld id="{63289F7E-B80B-496E-81B4-D396C37C9454}" type="datetimeFigureOut">
               <a:rPr lang="pt-BR" smtClean="0"/>
-              <a:t>19/02/2024</a:t>
+              <a:t>01/03/2026</a:t>
             </a:fld>
             <a:endParaRPr lang="pt-BR"/>
           </a:p>
@@ -1002,7 +1002,7 @@
           <a:p>
             <a:fld id="{1A7E88B7-70CE-4035-AE73-13FA6FB985D4}" type="slidenum">
               <a:rPr lang="pt-BR" smtClean="0"/>
-              <a:t>‹nº›</a:t>
+              <a:t>‹#›</a:t>
             </a:fld>
             <a:endParaRPr lang="pt-BR"/>
           </a:p>
@@ -1146,7 +1146,7 @@
           <a:p>
             <a:fld id="{63289F7E-B80B-496E-81B4-D396C37C9454}" type="datetimeFigureOut">
               <a:rPr lang="pt-BR" smtClean="0"/>
-              <a:t>19/02/2024</a:t>
+              <a:t>01/03/2026</a:t>
             </a:fld>
             <a:endParaRPr lang="pt-BR"/>
           </a:p>
@@ -1200,7 +1200,7 @@
           <a:p>
             <a:fld id="{1A7E88B7-70CE-4035-AE73-13FA6FB985D4}" type="slidenum">
               <a:rPr lang="pt-BR" smtClean="0"/>
-              <a:t>‹nº›</a:t>
+              <a:t>‹#›</a:t>
             </a:fld>
             <a:endParaRPr lang="pt-BR"/>
           </a:p>
@@ -1354,7 +1354,7 @@
           <a:p>
             <a:fld id="{63289F7E-B80B-496E-81B4-D396C37C9454}" type="datetimeFigureOut">
               <a:rPr lang="pt-BR" smtClean="0"/>
-              <a:t>19/02/2024</a:t>
+              <a:t>01/03/2026</a:t>
             </a:fld>
             <a:endParaRPr lang="pt-BR"/>
           </a:p>
@@ -1408,7 +1408,7 @@
           <a:p>
             <a:fld id="{1A7E88B7-70CE-4035-AE73-13FA6FB985D4}" type="slidenum">
               <a:rPr lang="pt-BR" smtClean="0"/>
-              <a:t>‹nº›</a:t>
+              <a:t>‹#›</a:t>
             </a:fld>
             <a:endParaRPr lang="pt-BR"/>
           </a:p>
@@ -1552,7 +1552,7 @@
           <a:p>
             <a:fld id="{63289F7E-B80B-496E-81B4-D396C37C9454}" type="datetimeFigureOut">
               <a:rPr lang="pt-BR" smtClean="0"/>
-              <a:t>19/02/2024</a:t>
+              <a:t>01/03/2026</a:t>
             </a:fld>
             <a:endParaRPr lang="pt-BR"/>
           </a:p>
@@ -1606,7 +1606,7 @@
           <a:p>
             <a:fld id="{1A7E88B7-70CE-4035-AE73-13FA6FB985D4}" type="slidenum">
               <a:rPr lang="pt-BR" smtClean="0"/>
-              <a:t>‹nº›</a:t>
+              <a:t>‹#›</a:t>
             </a:fld>
             <a:endParaRPr lang="pt-BR"/>
           </a:p>
@@ -1827,7 +1827,7 @@
           <a:p>
             <a:fld id="{63289F7E-B80B-496E-81B4-D396C37C9454}" type="datetimeFigureOut">
               <a:rPr lang="pt-BR" smtClean="0"/>
-              <a:t>19/02/2024</a:t>
+              <a:t>01/03/2026</a:t>
             </a:fld>
             <a:endParaRPr lang="pt-BR"/>
           </a:p>
@@ -1881,7 +1881,7 @@
           <a:p>
             <a:fld id="{1A7E88B7-70CE-4035-AE73-13FA6FB985D4}" type="slidenum">
               <a:rPr lang="pt-BR" smtClean="0"/>
-              <a:t>‹nº›</a:t>
+              <a:t>‹#›</a:t>
             </a:fld>
             <a:endParaRPr lang="pt-BR"/>
           </a:p>
@@ -2092,7 +2092,7 @@
           <a:p>
             <a:fld id="{63289F7E-B80B-496E-81B4-D396C37C9454}" type="datetimeFigureOut">
               <a:rPr lang="pt-BR" smtClean="0"/>
-              <a:t>19/02/2024</a:t>
+              <a:t>01/03/2026</a:t>
             </a:fld>
             <a:endParaRPr lang="pt-BR"/>
           </a:p>
@@ -2146,7 +2146,7 @@
           <a:p>
             <a:fld id="{1A7E88B7-70CE-4035-AE73-13FA6FB985D4}" type="slidenum">
               <a:rPr lang="pt-BR" smtClean="0"/>
-              <a:t>‹nº›</a:t>
+              <a:t>‹#›</a:t>
             </a:fld>
             <a:endParaRPr lang="pt-BR"/>
           </a:p>
@@ -2504,7 +2504,7 @@
           <a:p>
             <a:fld id="{63289F7E-B80B-496E-81B4-D396C37C9454}" type="datetimeFigureOut">
               <a:rPr lang="pt-BR" smtClean="0"/>
-              <a:t>19/02/2024</a:t>
+              <a:t>01/03/2026</a:t>
             </a:fld>
             <a:endParaRPr lang="pt-BR"/>
           </a:p>
@@ -2558,7 +2558,7 @@
           <a:p>
             <a:fld id="{1A7E88B7-70CE-4035-AE73-13FA6FB985D4}" type="slidenum">
               <a:rPr lang="pt-BR" smtClean="0"/>
-              <a:t>‹nº›</a:t>
+              <a:t>‹#›</a:t>
             </a:fld>
             <a:endParaRPr lang="pt-BR"/>
           </a:p>
@@ -2645,7 +2645,7 @@
           <a:p>
             <a:fld id="{63289F7E-B80B-496E-81B4-D396C37C9454}" type="datetimeFigureOut">
               <a:rPr lang="pt-BR" smtClean="0"/>
-              <a:t>19/02/2024</a:t>
+              <a:t>01/03/2026</a:t>
             </a:fld>
             <a:endParaRPr lang="pt-BR"/>
           </a:p>
@@ -2699,7 +2699,7 @@
           <a:p>
             <a:fld id="{1A7E88B7-70CE-4035-AE73-13FA6FB985D4}" type="slidenum">
               <a:rPr lang="pt-BR" smtClean="0"/>
-              <a:t>‹nº›</a:t>
+              <a:t>‹#›</a:t>
             </a:fld>
             <a:endParaRPr lang="pt-BR"/>
           </a:p>
@@ -2758,7 +2758,7 @@
           <a:p>
             <a:fld id="{63289F7E-B80B-496E-81B4-D396C37C9454}" type="datetimeFigureOut">
               <a:rPr lang="pt-BR" smtClean="0"/>
-              <a:t>19/02/2024</a:t>
+              <a:t>01/03/2026</a:t>
             </a:fld>
             <a:endParaRPr lang="pt-BR"/>
           </a:p>
@@ -2812,7 +2812,7 @@
           <a:p>
             <a:fld id="{1A7E88B7-70CE-4035-AE73-13FA6FB985D4}" type="slidenum">
               <a:rPr lang="pt-BR" smtClean="0"/>
-              <a:t>‹nº›</a:t>
+              <a:t>‹#›</a:t>
             </a:fld>
             <a:endParaRPr lang="pt-BR"/>
           </a:p>
@@ -3069,7 +3069,7 @@
           <a:p>
             <a:fld id="{63289F7E-B80B-496E-81B4-D396C37C9454}" type="datetimeFigureOut">
               <a:rPr lang="pt-BR" smtClean="0"/>
-              <a:t>19/02/2024</a:t>
+              <a:t>01/03/2026</a:t>
             </a:fld>
             <a:endParaRPr lang="pt-BR"/>
           </a:p>
@@ -3123,7 +3123,7 @@
           <a:p>
             <a:fld id="{1A7E88B7-70CE-4035-AE73-13FA6FB985D4}" type="slidenum">
               <a:rPr lang="pt-BR" smtClean="0"/>
-              <a:t>‹nº›</a:t>
+              <a:t>‹#›</a:t>
             </a:fld>
             <a:endParaRPr lang="pt-BR"/>
           </a:p>
@@ -3357,7 +3357,7 @@
           <a:p>
             <a:fld id="{63289F7E-B80B-496E-81B4-D396C37C9454}" type="datetimeFigureOut">
               <a:rPr lang="pt-BR" smtClean="0"/>
-              <a:t>19/02/2024</a:t>
+              <a:t>01/03/2026</a:t>
             </a:fld>
             <a:endParaRPr lang="pt-BR"/>
           </a:p>
@@ -3411,7 +3411,7 @@
           <a:p>
             <a:fld id="{1A7E88B7-70CE-4035-AE73-13FA6FB985D4}" type="slidenum">
               <a:rPr lang="pt-BR" smtClean="0"/>
-              <a:t>‹nº›</a:t>
+              <a:t>‹#›</a:t>
             </a:fld>
             <a:endParaRPr lang="pt-BR"/>
           </a:p>
@@ -3598,7 +3598,7 @@
           <a:p>
             <a:fld id="{63289F7E-B80B-496E-81B4-D396C37C9454}" type="datetimeFigureOut">
               <a:rPr lang="pt-BR" smtClean="0"/>
-              <a:t>19/02/2024</a:t>
+              <a:t>01/03/2026</a:t>
             </a:fld>
             <a:endParaRPr lang="pt-BR"/>
           </a:p>
@@ -3688,7 +3688,7 @@
           <a:p>
             <a:fld id="{1A7E88B7-70CE-4035-AE73-13FA6FB985D4}" type="slidenum">
               <a:rPr lang="pt-BR" smtClean="0"/>
-              <a:t>‹nº›</a:t>
+              <a:t>‹#›</a:t>
             </a:fld>
             <a:endParaRPr lang="pt-BR"/>
           </a:p>
@@ -4272,7 +4272,10 @@
           <a:bodyPr/>
           <a:lstStyle/>
           <a:p>
-            <a:endParaRPr lang="pt-BR"/>
+            <a:r>
+              <a:rPr lang="pt-BR" dirty="0"/>
+              <a:t>Artigos, livros, blogs, etc. usados como referência para o desenvolvimento do seminário.</a:t>
+            </a:r>
           </a:p>
         </p:txBody>
       </p:sp>
@@ -4415,7 +4418,7 @@
           <a:p>
             <a:r>
               <a:rPr lang="pt-BR" dirty="0"/>
-              <a:t>Introdução</a:t>
+              <a:t>Abertura</a:t>
             </a:r>
           </a:p>
         </p:txBody>
@@ -4441,7 +4444,25 @@
           <a:bodyPr/>
           <a:lstStyle/>
           <a:p>
-            <a:endParaRPr lang="pt-BR" dirty="0"/>
+            <a:pPr fontAlgn="base"/>
+            <a:r>
+              <a:rPr lang="pt-BR" dirty="0"/>
+              <a:t>Contexto do tema</a:t>
+            </a:r>
+          </a:p>
+          <a:p>
+            <a:pPr fontAlgn="base"/>
+            <a:r>
+              <a:rPr lang="pt-BR" dirty="0"/>
+              <a:t>Problema geral da área</a:t>
+            </a:r>
+          </a:p>
+          <a:p>
+            <a:pPr fontAlgn="base"/>
+            <a:r>
+              <a:rPr lang="pt-BR" dirty="0"/>
+              <a:t>Motivação do artigo</a:t>
+            </a:r>
           </a:p>
         </p:txBody>
       </p:sp>
@@ -4463,7 +4484,13 @@
   <p:cSld>
     <p:spTree>
       <p:nvGrpSpPr>
-        <p:cNvPr id="1" name=""/>
+        <p:cNvPr id="1" name="">
+          <a:extLst>
+            <a:ext uri="{FF2B5EF4-FFF2-40B4-BE49-F238E27FC236}">
+              <a16:creationId xmlns:a16="http://schemas.microsoft.com/office/drawing/2014/main" id="{25D7944B-3372-1D90-B28C-FB39520968C9}"/>
+            </a:ext>
+          </a:extLst>
+        </p:cNvPr>
         <p:cNvGrpSpPr/>
         <p:nvPr/>
       </p:nvGrpSpPr>
@@ -4480,7 +4507,7 @@
           <p:cNvPr id="2" name="Título 1">
             <a:extLst>
               <a:ext uri="{FF2B5EF4-FFF2-40B4-BE49-F238E27FC236}">
-                <a16:creationId xmlns:a16="http://schemas.microsoft.com/office/drawing/2014/main" id="{94AB8438-E56E-2412-517C-8456E4CA773C}"/>
+                <a16:creationId xmlns:a16="http://schemas.microsoft.com/office/drawing/2014/main" id="{0452B460-304F-8D6A-49E2-170E86973EFE}"/>
               </a:ext>
             </a:extLst>
           </p:cNvPr>
@@ -4498,7 +4525,7 @@
           <a:p>
             <a:r>
               <a:rPr lang="pt-BR" dirty="0"/>
-              <a:t>Fundamentação teórica</a:t>
+              <a:t>Introdução do artigo</a:t>
             </a:r>
           </a:p>
         </p:txBody>
@@ -4508,7 +4535,7 @@
           <p:cNvPr id="3" name="Espaço Reservado para Conteúdo 2">
             <a:extLst>
               <a:ext uri="{FF2B5EF4-FFF2-40B4-BE49-F238E27FC236}">
-                <a16:creationId xmlns:a16="http://schemas.microsoft.com/office/drawing/2014/main" id="{F7E2B09C-6D56-4C9F-A364-B904CCE2F1A0}"/>
+                <a16:creationId xmlns:a16="http://schemas.microsoft.com/office/drawing/2014/main" id="{A9FDF00C-07E3-57DD-2C43-753297609C4B}"/>
               </a:ext>
             </a:extLst>
           </p:cNvPr>
@@ -4524,14 +4551,35 @@
           <a:bodyPr/>
           <a:lstStyle/>
           <a:p>
-            <a:endParaRPr lang="pt-BR"/>
+            <a:pPr fontAlgn="base"/>
+            <a:r>
+              <a:rPr lang="pt-BR" dirty="0"/>
+              <a:t>Objetivo</a:t>
+            </a:r>
+            <a:endParaRPr lang="pt-BR" b="1" dirty="0"/>
+          </a:p>
+          <a:p>
+            <a:pPr fontAlgn="base"/>
+            <a:r>
+              <a:rPr lang="pt-BR" dirty="0"/>
+              <a:t>Hipótese</a:t>
+            </a:r>
+            <a:endParaRPr lang="pt-BR" b="1" dirty="0"/>
+          </a:p>
+          <a:p>
+            <a:pPr fontAlgn="base"/>
+            <a:r>
+              <a:rPr lang="pt-BR" dirty="0"/>
+              <a:t>Contribuições declaradas pelos autores</a:t>
+            </a:r>
+            <a:endParaRPr lang="pt-BR" b="1" dirty="0"/>
           </a:p>
         </p:txBody>
       </p:sp>
     </p:spTree>
     <p:extLst>
       <p:ext uri="{BB962C8B-B14F-4D97-AF65-F5344CB8AC3E}">
-        <p14:creationId xmlns:p14="http://schemas.microsoft.com/office/powerpoint/2010/main" val="3187071590"/>
+        <p14:creationId xmlns:p14="http://schemas.microsoft.com/office/powerpoint/2010/main" val="2982830720"/>
       </p:ext>
     </p:extLst>
   </p:cSld>
@@ -4563,6 +4611,102 @@
           <p:cNvPr id="2" name="Título 1">
             <a:extLst>
               <a:ext uri="{FF2B5EF4-FFF2-40B4-BE49-F238E27FC236}">
+                <a16:creationId xmlns:a16="http://schemas.microsoft.com/office/drawing/2014/main" id="{94AB8438-E56E-2412-517C-8456E4CA773C}"/>
+              </a:ext>
+            </a:extLst>
+          </p:cNvPr>
+          <p:cNvSpPr>
+            <a:spLocks noGrp="1"/>
+          </p:cNvSpPr>
+          <p:nvPr>
+            <p:ph type="title"/>
+          </p:nvPr>
+        </p:nvSpPr>
+        <p:spPr/>
+        <p:txBody>
+          <a:bodyPr/>
+          <a:lstStyle/>
+          <a:p>
+            <a:r>
+              <a:rPr lang="pt-BR" dirty="0"/>
+              <a:t>Fundamentação teórica</a:t>
+            </a:r>
+          </a:p>
+        </p:txBody>
+      </p:sp>
+      <p:sp>
+        <p:nvSpPr>
+          <p:cNvPr id="3" name="Espaço Reservado para Conteúdo 2">
+            <a:extLst>
+              <a:ext uri="{FF2B5EF4-FFF2-40B4-BE49-F238E27FC236}">
+                <a16:creationId xmlns:a16="http://schemas.microsoft.com/office/drawing/2014/main" id="{F7E2B09C-6D56-4C9F-A364-B904CCE2F1A0}"/>
+              </a:ext>
+            </a:extLst>
+          </p:cNvPr>
+          <p:cNvSpPr>
+            <a:spLocks noGrp="1"/>
+          </p:cNvSpPr>
+          <p:nvPr>
+            <p:ph idx="1"/>
+          </p:nvPr>
+        </p:nvSpPr>
+        <p:spPr/>
+        <p:txBody>
+          <a:bodyPr/>
+          <a:lstStyle/>
+          <a:p>
+            <a:pPr fontAlgn="base"/>
+            <a:r>
+              <a:rPr lang="pt-BR" dirty="0"/>
+              <a:t>Conceitos necessários para entender o trabalho</a:t>
+            </a:r>
+            <a:endParaRPr lang="pt-BR" b="1" dirty="0"/>
+          </a:p>
+          <a:p>
+            <a:pPr fontAlgn="base"/>
+            <a:r>
+              <a:rPr lang="pt-BR" dirty="0"/>
+              <a:t>Trabalhos relacionados mais importantes</a:t>
+            </a:r>
+            <a:endParaRPr lang="pt-BR" b="1" dirty="0"/>
+          </a:p>
+        </p:txBody>
+      </p:sp>
+    </p:spTree>
+    <p:extLst>
+      <p:ext uri="{BB962C8B-B14F-4D97-AF65-F5344CB8AC3E}">
+        <p14:creationId xmlns:p14="http://schemas.microsoft.com/office/powerpoint/2010/main" val="3187071590"/>
+      </p:ext>
+    </p:extLst>
+  </p:cSld>
+  <p:clrMapOvr>
+    <a:masterClrMapping/>
+  </p:clrMapOvr>
+</p:sld>
+</file>
+
+<file path=ppt/slides/slide5.xml><?xml version="1.0" encoding="utf-8"?>
+<p:sld xmlns:a="http://schemas.openxmlformats.org/drawingml/2006/main" xmlns:r="http://schemas.openxmlformats.org/officeDocument/2006/relationships" xmlns:p="http://schemas.openxmlformats.org/presentationml/2006/main">
+  <p:cSld>
+    <p:spTree>
+      <p:nvGrpSpPr>
+        <p:cNvPr id="1" name=""/>
+        <p:cNvGrpSpPr/>
+        <p:nvPr/>
+      </p:nvGrpSpPr>
+      <p:grpSpPr>
+        <a:xfrm>
+          <a:off x="0" y="0"/>
+          <a:ext cx="0" cy="0"/>
+          <a:chOff x="0" y="0"/>
+          <a:chExt cx="0" cy="0"/>
+        </a:xfrm>
+      </p:grpSpPr>
+      <p:sp>
+        <p:nvSpPr>
+          <p:cNvPr id="2" name="Título 1">
+            <a:extLst>
+              <a:ext uri="{FF2B5EF4-FFF2-40B4-BE49-F238E27FC236}">
                 <a16:creationId xmlns:a16="http://schemas.microsoft.com/office/drawing/2014/main" id="{083FFF02-0FC8-9F0B-AAB0-565FC99EA70D}"/>
               </a:ext>
             </a:extLst>
@@ -4581,7 +4725,7 @@
           <a:p>
             <a:r>
               <a:rPr lang="pt-BR" dirty="0"/>
-              <a:t>Arquitetura e funcionamento</a:t>
+              <a:t>Metodologia</a:t>
             </a:r>
           </a:p>
         </p:txBody>
@@ -4607,7 +4751,25 @@
           <a:bodyPr/>
           <a:lstStyle/>
           <a:p>
-            <a:endParaRPr lang="pt-BR"/>
+            <a:pPr fontAlgn="base"/>
+            <a:r>
+              <a:rPr lang="pt-BR" dirty="0"/>
+              <a:t>Base de dados / cenário experimental</a:t>
+            </a:r>
+          </a:p>
+          <a:p>
+            <a:pPr fontAlgn="base"/>
+            <a:r>
+              <a:rPr lang="pt-BR" dirty="0"/>
+              <a:t>Modelos, algoritmos ou abordagem</a:t>
+            </a:r>
+          </a:p>
+          <a:p>
+            <a:pPr fontAlgn="base"/>
+            <a:r>
+              <a:rPr lang="pt-BR" dirty="0"/>
+              <a:t>Fluxo do método</a:t>
+            </a:r>
           </a:p>
         </p:txBody>
       </p:sp>
@@ -4624,7 +4786,7 @@
 </p:sld>
 </file>
 
-<file path=ppt/slides/slide5.xml><?xml version="1.0" encoding="utf-8"?>
+<file path=ppt/slides/slide6.xml><?xml version="1.0" encoding="utf-8"?>
 <p:sld xmlns:a="http://schemas.openxmlformats.org/drawingml/2006/main" xmlns:r="http://schemas.openxmlformats.org/officeDocument/2006/relationships" xmlns:p="http://schemas.openxmlformats.org/presentationml/2006/main">
   <p:cSld>
     <p:spTree>
@@ -4670,7 +4832,7 @@
           <a:p>
             <a:r>
               <a:rPr lang="pt-BR" dirty="0"/>
-              <a:t>Treinamento e otimização</a:t>
+              <a:t>Resultados</a:t>
             </a:r>
           </a:p>
         </p:txBody>
@@ -4696,7 +4858,32 @@
           <a:bodyPr/>
           <a:lstStyle/>
           <a:p>
-            <a:endParaRPr lang="pt-BR"/>
+            <a:pPr fontAlgn="base"/>
+            <a:r>
+              <a:rPr lang="pt-BR" dirty="0"/>
+              <a:t>Principais gráficos/tabelas</a:t>
+            </a:r>
+          </a:p>
+          <a:p>
+            <a:pPr fontAlgn="base"/>
+            <a:r>
+              <a:rPr lang="pt-BR" dirty="0"/>
+              <a:t>Comparação com estado da arte</a:t>
+            </a:r>
+          </a:p>
+          <a:p>
+            <a:pPr fontAlgn="base"/>
+            <a:r>
+              <a:rPr lang="pt-BR" dirty="0"/>
+              <a:t>O que funcionou e o que não funcionou</a:t>
+            </a:r>
+          </a:p>
+          <a:p>
+            <a:pPr fontAlgn="base"/>
+            <a:r>
+              <a:rPr lang="pt-BR" dirty="0"/>
+              <a:t>Reproduzir os resultados ou parte deles é importante.</a:t>
+            </a:r>
           </a:p>
         </p:txBody>
       </p:sp>
@@ -4713,7 +4900,7 @@
 </p:sld>
 </file>
 
-<file path=ppt/slides/slide6.xml><?xml version="1.0" encoding="utf-8"?>
+<file path=ppt/slides/slide7.xml><?xml version="1.0" encoding="utf-8"?>
 <p:sld xmlns:a="http://schemas.openxmlformats.org/drawingml/2006/main" xmlns:r="http://schemas.openxmlformats.org/officeDocument/2006/relationships" xmlns:p="http://schemas.openxmlformats.org/presentationml/2006/main">
   <p:cSld>
     <p:spTree>
@@ -4759,7 +4946,7 @@
           <a:p>
             <a:r>
               <a:rPr lang="pt-BR" dirty="0"/>
-              <a:t>Vantagens e desvantagens</a:t>
+              <a:t>Análise crítica do trabalho</a:t>
             </a:r>
           </a:p>
         </p:txBody>
@@ -4785,7 +4972,32 @@
           <a:bodyPr/>
           <a:lstStyle/>
           <a:p>
-            <a:endParaRPr lang="pt-BR"/>
+            <a:pPr fontAlgn="base"/>
+            <a:r>
+              <a:rPr lang="pt-BR" dirty="0"/>
+              <a:t>Pontos fortes</a:t>
+            </a:r>
+          </a:p>
+          <a:p>
+            <a:pPr fontAlgn="base"/>
+            <a:r>
+              <a:rPr lang="pt-BR" dirty="0"/>
+              <a:t>Limitações</a:t>
+            </a:r>
+          </a:p>
+          <a:p>
+            <a:pPr fontAlgn="base"/>
+            <a:r>
+              <a:rPr lang="pt-BR" dirty="0"/>
+              <a:t>Possíveis melhorias</a:t>
+            </a:r>
+          </a:p>
+          <a:p>
+            <a:pPr fontAlgn="base"/>
+            <a:r>
+              <a:rPr lang="pt-BR" dirty="0"/>
+              <a:t>Aplicações práticas</a:t>
+            </a:r>
           </a:p>
         </p:txBody>
       </p:sp>
@@ -4793,89 +5005,6 @@
     <p:extLst>
       <p:ext uri="{BB962C8B-B14F-4D97-AF65-F5344CB8AC3E}">
         <p14:creationId xmlns:p14="http://schemas.microsoft.com/office/powerpoint/2010/main" val="1521811257"/>
-      </p:ext>
-    </p:extLst>
-  </p:cSld>
-  <p:clrMapOvr>
-    <a:masterClrMapping/>
-  </p:clrMapOvr>
-</p:sld>
-</file>
-
-<file path=ppt/slides/slide7.xml><?xml version="1.0" encoding="utf-8"?>
-<p:sld xmlns:a="http://schemas.openxmlformats.org/drawingml/2006/main" xmlns:r="http://schemas.openxmlformats.org/officeDocument/2006/relationships" xmlns:p="http://schemas.openxmlformats.org/presentationml/2006/main">
-  <p:cSld>
-    <p:spTree>
-      <p:nvGrpSpPr>
-        <p:cNvPr id="1" name=""/>
-        <p:cNvGrpSpPr/>
-        <p:nvPr/>
-      </p:nvGrpSpPr>
-      <p:grpSpPr>
-        <a:xfrm>
-          <a:off x="0" y="0"/>
-          <a:ext cx="0" cy="0"/>
-          <a:chOff x="0" y="0"/>
-          <a:chExt cx="0" cy="0"/>
-        </a:xfrm>
-      </p:grpSpPr>
-      <p:sp>
-        <p:nvSpPr>
-          <p:cNvPr id="2" name="Título 1">
-            <a:extLst>
-              <a:ext uri="{FF2B5EF4-FFF2-40B4-BE49-F238E27FC236}">
-                <a16:creationId xmlns:a16="http://schemas.microsoft.com/office/drawing/2014/main" id="{B9E502FC-4440-F5DA-F299-69CD15E702AE}"/>
-              </a:ext>
-            </a:extLst>
-          </p:cNvPr>
-          <p:cNvSpPr>
-            <a:spLocks noGrp="1"/>
-          </p:cNvSpPr>
-          <p:nvPr>
-            <p:ph type="title"/>
-          </p:nvPr>
-        </p:nvSpPr>
-        <p:spPr/>
-        <p:txBody>
-          <a:bodyPr/>
-          <a:lstStyle/>
-          <a:p>
-            <a:r>
-              <a:rPr lang="pt-BR" dirty="0"/>
-              <a:t>Exemplo(s) de aplicação</a:t>
-            </a:r>
-          </a:p>
-        </p:txBody>
-      </p:sp>
-      <p:sp>
-        <p:nvSpPr>
-          <p:cNvPr id="3" name="Espaço Reservado para Conteúdo 2">
-            <a:extLst>
-              <a:ext uri="{FF2B5EF4-FFF2-40B4-BE49-F238E27FC236}">
-                <a16:creationId xmlns:a16="http://schemas.microsoft.com/office/drawing/2014/main" id="{69359096-6B47-BEA3-55AD-95F90CDC8489}"/>
-              </a:ext>
-            </a:extLst>
-          </p:cNvPr>
-          <p:cNvSpPr>
-            <a:spLocks noGrp="1"/>
-          </p:cNvSpPr>
-          <p:nvPr>
-            <p:ph idx="1"/>
-          </p:nvPr>
-        </p:nvSpPr>
-        <p:spPr/>
-        <p:txBody>
-          <a:bodyPr/>
-          <a:lstStyle/>
-          <a:p>
-            <a:endParaRPr lang="pt-BR"/>
-          </a:p>
-        </p:txBody>
-      </p:sp>
-    </p:spTree>
-    <p:extLst>
-      <p:ext uri="{BB962C8B-B14F-4D97-AF65-F5344CB8AC3E}">
-        <p14:creationId xmlns:p14="http://schemas.microsoft.com/office/powerpoint/2010/main" val="1532530965"/>
       </p:ext>
     </p:extLst>
   </p:cSld>
@@ -4907,7 +5036,7 @@
           <p:cNvPr id="2" name="Título 1">
             <a:extLst>
               <a:ext uri="{FF2B5EF4-FFF2-40B4-BE49-F238E27FC236}">
-                <a16:creationId xmlns:a16="http://schemas.microsoft.com/office/drawing/2014/main" id="{B7EBC8F7-03EF-338A-A90B-280A41AF9688}"/>
+                <a16:creationId xmlns:a16="http://schemas.microsoft.com/office/drawing/2014/main" id="{B9E502FC-4440-F5DA-F299-69CD15E702AE}"/>
               </a:ext>
             </a:extLst>
           </p:cNvPr>
@@ -4924,41 +5053,60 @@
           <a:lstStyle/>
           <a:p>
             <a:r>
+              <a:rPr lang="en-US" dirty="0" err="1"/>
+              <a:t>Conclusão</a:t>
+            </a:r>
+            <a:endParaRPr lang="pt-BR" dirty="0"/>
+          </a:p>
+        </p:txBody>
+      </p:sp>
+      <p:sp>
+        <p:nvSpPr>
+          <p:cNvPr id="3" name="Espaço Reservado para Conteúdo 2">
+            <a:extLst>
+              <a:ext uri="{FF2B5EF4-FFF2-40B4-BE49-F238E27FC236}">
+                <a16:creationId xmlns:a16="http://schemas.microsoft.com/office/drawing/2014/main" id="{69359096-6B47-BEA3-55AD-95F90CDC8489}"/>
+              </a:ext>
+            </a:extLst>
+          </p:cNvPr>
+          <p:cNvSpPr>
+            <a:spLocks noGrp="1"/>
+          </p:cNvSpPr>
+          <p:nvPr>
+            <p:ph idx="1"/>
+          </p:nvPr>
+        </p:nvSpPr>
+        <p:spPr/>
+        <p:txBody>
+          <a:bodyPr/>
+          <a:lstStyle/>
+          <a:p>
+            <a:pPr fontAlgn="base"/>
+            <a:r>
               <a:rPr lang="pt-BR" dirty="0"/>
-              <a:t>Comparação com outros algoritmos</a:t>
-            </a:r>
-          </a:p>
-        </p:txBody>
-      </p:sp>
-      <p:sp>
-        <p:nvSpPr>
-          <p:cNvPr id="3" name="Espaço Reservado para Conteúdo 2">
-            <a:extLst>
-              <a:ext uri="{FF2B5EF4-FFF2-40B4-BE49-F238E27FC236}">
-                <a16:creationId xmlns:a16="http://schemas.microsoft.com/office/drawing/2014/main" id="{C525BCE7-C19D-7DDA-016A-E3016C398CBA}"/>
-              </a:ext>
-            </a:extLst>
-          </p:cNvPr>
-          <p:cNvSpPr>
-            <a:spLocks noGrp="1"/>
-          </p:cNvSpPr>
-          <p:nvPr>
-            <p:ph idx="1"/>
-          </p:nvPr>
-        </p:nvSpPr>
-        <p:spPr/>
-        <p:txBody>
-          <a:bodyPr/>
-          <a:lstStyle/>
-          <a:p>
-            <a:endParaRPr lang="pt-BR"/>
+              <a:t>Síntese do que foi aprendido</a:t>
+            </a:r>
+          </a:p>
+          <a:p>
+            <a:pPr fontAlgn="base"/>
+            <a:r>
+              <a:rPr lang="pt-BR" dirty="0"/>
+              <a:t>Impacto do trabalho</a:t>
+            </a:r>
+          </a:p>
+          <a:p>
+            <a:pPr fontAlgn="base"/>
+            <a:r>
+              <a:rPr lang="pt-BR" dirty="0"/>
+              <a:t>Direções futuras propostas pelos autores ou encontradas por você</a:t>
+            </a:r>
           </a:p>
         </p:txBody>
       </p:sp>
     </p:spTree>
     <p:extLst>
       <p:ext uri="{BB962C8B-B14F-4D97-AF65-F5344CB8AC3E}">
-        <p14:creationId xmlns:p14="http://schemas.microsoft.com/office/powerpoint/2010/main" val="3601469261"/>
+        <p14:creationId xmlns:p14="http://schemas.microsoft.com/office/powerpoint/2010/main" val="1532530965"/>
       </p:ext>
     </p:extLst>
   </p:cSld>
